--- a/public/fun/pack/pptx/newspro/카드뉴스프리미엄_29_감사·칭찬_코냑크림.pptx
+++ b/public/fun/pack/pptx/newspro/카드뉴스프리미엄_29_감사·칭찬_코냑크림.pptx
@@ -113,12 +113,12 @@
   <p:extLst>
     <p:ext uri="{521415D9-36F7-43E2-AB2F-B90AF26B5E84}">
       <p14:sectionLst xmlns:p14="http://schemas.microsoft.com/office/powerpoint/2010/main">
-        <p14:section name="시작" id="{D58CA9C2-9635-4762-9ACA-69A8E53D3BA3}">
+        <p14:section name="시작" id="{7E8BDE14-4377-408E-B84A-48816EE61C2A}">
           <p14:sldIdLst>
             <p14:sldId id="256"/>
           </p14:sldIdLst>
         </p14:section>
-        <p14:section name="본문" id="{65ED3E66-C7D8-48E3-B6BB-41CFEA045475}">
+        <p14:section name="본문" id="{45ABFCB7-80F0-4C15-9385-01F7E6D2A597}">
           <p14:sldIdLst>
             <p14:sldId id="257"/>
             <p14:sldId id="258"/>
@@ -127,7 +127,7 @@
             <p14:sldId id="261"/>
           </p14:sldIdLst>
         </p14:section>
-        <p14:section name="마무리" id="{0B05253D-392B-4A00-8761-897B89589E03}">
+        <p14:section name="마무리" id="{EB5F2CFB-6675-44AA-A082-1759AC30B767}">
           <p14:sldIdLst>
             <p14:sldId id="262"/>
           </p14:sldIdLst>
@@ -1974,7 +1974,7 @@
             </a:lvl1pPr>
           </a:lstStyle>
           <a:p>
-            <a:fld id="{52348D33-A02C-496A-9321-44661B835B9B}" type="slidenum">
+            <a:fld id="{ECFE49A8-C917-4188-9D05-D76255315B84}" type="slidenum">
               <a:rPr lang="en-US"/>
               <a:t>‹#›</a:t>
             </a:fld>
@@ -3155,7 +3155,7 @@
             </a:lvl1pPr>
           </a:lstStyle>
           <a:p>
-            <a:fld id="{EE17283B-7CEC-44E1-976D-C0EC33B3995B}" type="slidenum">
+            <a:fld id="{D57E9624-4C80-4359-919D-74D2EC5140C0}" type="slidenum">
               <a:rPr lang="en-US"/>
               <a:t>‹#›</a:t>
             </a:fld>
@@ -3911,7 +3911,7 @@
             </a:lvl1pPr>
           </a:lstStyle>
           <a:p>
-            <a:fld id="{E4FD5591-9F30-443B-AEA3-65529598CD76}" type="slidenum">
+            <a:fld id="{D7299FA5-8A3B-498D-A828-2D9248736613}" type="slidenum">
               <a:rPr lang="en-US"/>
               <a:t>‹#›</a:t>
             </a:fld>
@@ -4973,7 +4973,7 @@
           <a:bodyPr/>
           <a:lstStyle/>
           <a:p>
-            <a:fld id="{5180EF6B-41B1-48B8-A467-4F4C1C874745}" type="slidenum">
+            <a:fld id="{55E3B524-4F13-4A3F-BED0-43F747997BD4}" type="slidenum">
               <a:rPr lang="en-US"/>
               <a:t>‹#›</a:t>
             </a:fld>
@@ -5139,7 +5139,7 @@
           <a:bodyPr/>
           <a:lstStyle/>
           <a:p>
-            <a:fld id="{9C4EAA21-9A51-4792-B2AE-4F47EC9F2188}" type="slidenum">
+            <a:fld id="{55B02E45-F6F6-42FA-9D2D-A4A852EB32D4}" type="slidenum">
               <a:rPr lang="en-US"/>
               <a:t>‹#›</a:t>
             </a:fld>
@@ -5305,7 +5305,7 @@
           <a:bodyPr/>
           <a:lstStyle/>
           <a:p>
-            <a:fld id="{986FFF22-F024-450A-B3D6-F43B015B3EF7}" type="slidenum">
+            <a:fld id="{66676D80-1C7F-430A-852A-EC0657D69841}" type="slidenum">
               <a:rPr lang="en-US"/>
               <a:t>‹#›</a:t>
             </a:fld>
@@ -5471,7 +5471,7 @@
           <a:bodyPr/>
           <a:lstStyle/>
           <a:p>
-            <a:fld id="{D41C831A-71D9-49B2-91A6-6ED4DB68662E}" type="slidenum">
+            <a:fld id="{09166A19-9FC4-4DE9-8EC2-F63CB9C205B1}" type="slidenum">
               <a:rPr lang="en-US"/>
               <a:t>‹#›</a:t>
             </a:fld>
@@ -5637,7 +5637,7 @@
           <a:bodyPr/>
           <a:lstStyle/>
           <a:p>
-            <a:fld id="{536C72A6-D771-418D-BA2D-2179DA455719}" type="slidenum">
+            <a:fld id="{ECD8CA2D-D714-40F8-937B-91D6CBD89DE7}" type="slidenum">
               <a:rPr lang="en-US"/>
               <a:t>‹#›</a:t>
             </a:fld>
